--- a/taller/SecuAI_Hackeando_la_IA.pptx
+++ b/taller/SecuAI_Hackeando_la_IA.pptx
@@ -7287,7 +7287,7 @@
                 </a:solidFill>
                 <a:latin typeface="Calibri"/>
               </a:rPr>
-              <a:t>José Picón · jose.bobal@gmail.com</a:t>
+              <a:t>José Picón · jmpicon@jmpicon.com</a:t>
             </a:r>
           </a:p>
         </p:txBody>
@@ -43837,7 +43837,7 @@
                 </a:solidFill>
                 <a:latin typeface="Calibri"/>
               </a:rPr>
-              <a:t>jose.bobal@gmail.com</a:t>
+              <a:t>jmpicon@jmpicon.com</a:t>
             </a:r>
           </a:p>
         </p:txBody>
@@ -44657,7 +44657,7 @@
                 </a:solidFill>
                 <a:latin typeface="Calibri"/>
               </a:rPr>
-              <a:t>José Picón  ·  jose.bobal@gmail.com  ·  SecuAI 2026</a:t>
+              <a:t>José Picón  ·  jmpicon@jmpicon.com  ·  SecuAI 2026</a:t>
             </a:r>
           </a:p>
         </p:txBody>
